--- a/outputs/oracle-packs/account-insights/artifacts/account-insights-exec-summary.pptx
+++ b/outputs/oracle-packs/account-insights/artifacts/account-insights-exec-summary.pptx
@@ -4661,7 +4661,7 @@
           <a:lstStyle/>
           <a:p>
             <a:r>
-              <a:t>Oracle AI accelerator packs</a:t>
+              <a:t>Oracle AI &amp; Data Solutions</a:t>
             </a:r>
           </a:p>
         </p:txBody>
@@ -5849,43 +5849,8 @@
         </p:nvSpPr>
         <p:spPr>
           <a:xfrm>
-            <a:off x="8577072" y="2203704"/>
-            <a:ext cx="3063240" cy="1700784"/>
-          </a:xfrm>
-          <a:prstGeom prst="rect">
-            <a:avLst/>
-          </a:prstGeom>
-          <a:noFill/>
-        </p:spPr>
-        <p:txBody>
-          <a:bodyPr wrap="square" lIns="0" rIns="0" tIns="0" bIns="0" anchor="ctr">
-            <a:spAutoFit/>
-          </a:bodyPr>
-          <a:lstStyle/>
-          <a:p>
-            <a:pPr algn="ctr"/>
-            <a:r>
-              <a:rPr sz="900" b="0">
-                <a:solidFill>
-                  <a:srgbClr val="8A9095"/>
-                </a:solidFill>
-                <a:latin typeface="Replica LL TT"/>
-              </a:rPr>
-              <a:t>Metric set not cleared for this channel.</a:t>
-            </a:r>
-          </a:p>
-        </p:txBody>
-      </p:sp>
-      <p:sp>
-        <p:nvSpPr>
-          <p:cNvPr id="33" name="TextBox 32"/>
-          <p:cNvSpPr txBox="1"/>
-          <p:nvPr/>
-        </p:nvSpPr>
-        <p:spPr>
-          <a:xfrm>
-            <a:off x="384048" y="4050792"/>
-            <a:ext cx="4224528" cy="219456"/>
+            <a:off x="8577072" y="2295144"/>
+            <a:ext cx="3063240" cy="219456"/>
           </a:xfrm>
           <a:prstGeom prst="rect">
             <a:avLst/>
@@ -5900,6 +5865,217 @@
           <a:p>
             <a:pPr algn="l"/>
             <a:r>
+              <a:rPr sz="800" b="0">
+                <a:solidFill>
+                  <a:srgbClr val="6B7076"/>
+                </a:solidFill>
+                <a:latin typeface="Replica LL TT"/>
+              </a:rPr>
+              <a:t>proof of value at DHL</a:t>
+            </a:r>
+          </a:p>
+        </p:txBody>
+      </p:sp>
+      <p:sp>
+        <p:nvSpPr>
+          <p:cNvPr id="33" name="TextBox 32"/>
+          <p:cNvSpPr txBox="1"/>
+          <p:nvPr/>
+        </p:nvSpPr>
+        <p:spPr>
+          <a:xfrm>
+            <a:off x="8577072" y="2569464"/>
+            <a:ext cx="3063240" cy="335280"/>
+          </a:xfrm>
+          <a:prstGeom prst="rect">
+            <a:avLst/>
+          </a:prstGeom>
+          <a:noFill/>
+        </p:spPr>
+        <p:txBody>
+          <a:bodyPr wrap="square" lIns="0" rIns="0" tIns="0" bIns="0" anchor="t">
+            <a:spAutoFit/>
+          </a:bodyPr>
+          <a:lstStyle/>
+          <a:p>
+            <a:pPr algn="l"/>
+            <a:r>
+              <a:rPr sz="1200" b="1">
+                <a:solidFill>
+                  <a:srgbClr val="1485C3"/>
+                </a:solidFill>
+                <a:latin typeface="Replica LL TT"/>
+              </a:rPr>
+              <a:t>Research time</a:t>
+            </a:r>
+          </a:p>
+          <a:p>
+            <a:pPr algn="l"/>
+            <a:r>
+              <a:rPr sz="720" b="0">
+                <a:solidFill>
+                  <a:srgbClr val="6B7076"/>
+                </a:solidFill>
+                <a:latin typeface="Replica LL TT"/>
+              </a:rPr>
+              <a:t>hours an account manager spends preparing a customer conversation</a:t>
+            </a:r>
+          </a:p>
+        </p:txBody>
+      </p:sp>
+      <p:sp>
+        <p:nvSpPr>
+          <p:cNvPr id="34" name="TextBox 33"/>
+          <p:cNvSpPr txBox="1"/>
+          <p:nvPr/>
+        </p:nvSpPr>
+        <p:spPr>
+          <a:xfrm>
+            <a:off x="8577072" y="2941320"/>
+            <a:ext cx="3063240" cy="335280"/>
+          </a:xfrm>
+          <a:prstGeom prst="rect">
+            <a:avLst/>
+          </a:prstGeom>
+          <a:noFill/>
+        </p:spPr>
+        <p:txBody>
+          <a:bodyPr wrap="square" lIns="0" rIns="0" tIns="0" bIns="0" anchor="t">
+            <a:spAutoFit/>
+          </a:bodyPr>
+          <a:lstStyle/>
+          <a:p>
+            <a:pPr algn="l"/>
+            <a:r>
+              <a:rPr sz="1200" b="1">
+                <a:solidFill>
+                  <a:srgbClr val="1485C3"/>
+                </a:solidFill>
+                <a:latin typeface="Replica LL TT"/>
+              </a:rPr>
+              <a:t>Time to act</a:t>
+            </a:r>
+          </a:p>
+          <a:p>
+            <a:pPr algn="l"/>
+            <a:r>
+              <a:rPr sz="720" b="0">
+                <a:solidFill>
+                  <a:srgbClr val="6B7076"/>
+                </a:solidFill>
+                <a:latin typeface="Replica LL TT"/>
+              </a:rPr>
+              <a:t>from a filing or news item to a reviewed next move in front of the team</a:t>
+            </a:r>
+          </a:p>
+        </p:txBody>
+      </p:sp>
+      <p:sp>
+        <p:nvSpPr>
+          <p:cNvPr id="35" name="TextBox 34"/>
+          <p:cNvSpPr txBox="1"/>
+          <p:nvPr/>
+        </p:nvSpPr>
+        <p:spPr>
+          <a:xfrm>
+            <a:off x="8577072" y="3313176"/>
+            <a:ext cx="3063240" cy="335280"/>
+          </a:xfrm>
+          <a:prstGeom prst="rect">
+            <a:avLst/>
+          </a:prstGeom>
+          <a:noFill/>
+        </p:spPr>
+        <p:txBody>
+          <a:bodyPr wrap="square" lIns="0" rIns="0" tIns="0" bIns="0" anchor="t">
+            <a:spAutoFit/>
+          </a:bodyPr>
+          <a:lstStyle/>
+          <a:p>
+            <a:pPr algn="l"/>
+            <a:r>
+              <a:rPr sz="1150" b="1">
+                <a:solidFill>
+                  <a:srgbClr val="1485C3"/>
+                </a:solidFill>
+                <a:latin typeface="Replica LL TT"/>
+              </a:rPr>
+              <a:t>Pipeline</a:t>
+            </a:r>
+          </a:p>
+          <a:p>
+            <a:pPr algn="l"/>
+            <a:r>
+              <a:rPr sz="690" b="0">
+                <a:solidFill>
+                  <a:srgbClr val="6B7076"/>
+                </a:solidFill>
+                <a:latin typeface="Replica LL TT"/>
+              </a:rPr>
+              <a:t>qualified opportunities added to the pipeline from the changes it surfaces</a:t>
+            </a:r>
+          </a:p>
+        </p:txBody>
+      </p:sp>
+      <p:sp>
+        <p:nvSpPr>
+          <p:cNvPr id="36" name="TextBox 35"/>
+          <p:cNvSpPr txBox="1"/>
+          <p:nvPr/>
+        </p:nvSpPr>
+        <p:spPr>
+          <a:xfrm>
+            <a:off x="8577072" y="3721608"/>
+            <a:ext cx="3063240" cy="182880"/>
+          </a:xfrm>
+          <a:prstGeom prst="rect">
+            <a:avLst/>
+          </a:prstGeom>
+          <a:noFill/>
+        </p:spPr>
+        <p:txBody>
+          <a:bodyPr wrap="square" lIns="0" rIns="0" tIns="0" bIns="0" anchor="t">
+            <a:spAutoFit/>
+          </a:bodyPr>
+          <a:lstStyle/>
+          <a:p>
+            <a:pPr algn="l"/>
+            <a:r>
+              <a:rPr sz="700" b="0">
+                <a:solidFill>
+                  <a:srgbClr val="8A9095"/>
+                </a:solidFill>
+                <a:latin typeface="Replica LL TT"/>
+              </a:rPr>
+              <a:t>Measured in the proof of value; results to follow.</a:t>
+            </a:r>
+          </a:p>
+        </p:txBody>
+      </p:sp>
+      <p:sp>
+        <p:nvSpPr>
+          <p:cNvPr id="37" name="TextBox 36"/>
+          <p:cNvSpPr txBox="1"/>
+          <p:nvPr/>
+        </p:nvSpPr>
+        <p:spPr>
+          <a:xfrm>
+            <a:off x="384048" y="4050792"/>
+            <a:ext cx="4224528" cy="219456"/>
+          </a:xfrm>
+          <a:prstGeom prst="rect">
+            <a:avLst/>
+          </a:prstGeom>
+          <a:noFill/>
+        </p:spPr>
+        <p:txBody>
+          <a:bodyPr wrap="square" lIns="0" rIns="0" tIns="0" bIns="0" anchor="t">
+            <a:spAutoFit/>
+          </a:bodyPr>
+          <a:lstStyle/>
+          <a:p>
+            <a:pPr algn="l"/>
+            <a:r>
               <a:rPr sz="1050" b="1">
                 <a:solidFill>
                   <a:srgbClr val="1485C3"/>
@@ -5913,7 +6089,7 @@
       </p:sp>
       <p:sp>
         <p:nvSpPr>
-          <p:cNvPr id="34" name="Rectangle 33"/>
+          <p:cNvPr id="38" name="Rectangle 37"/>
           <p:cNvSpPr/>
           <p:nvPr/>
         </p:nvSpPr>
@@ -5959,7 +6135,7 @@
       </p:sp>
       <p:sp>
         <p:nvSpPr>
-          <p:cNvPr id="35" name="Rectangle 34"/>
+          <p:cNvPr id="39" name="Rectangle 38"/>
           <p:cNvSpPr/>
           <p:nvPr/>
         </p:nvSpPr>
@@ -6003,7 +6179,7 @@
       </p:sp>
       <p:sp>
         <p:nvSpPr>
-          <p:cNvPr id="36" name="TextBox 35"/>
+          <p:cNvPr id="40" name="TextBox 39"/>
           <p:cNvSpPr txBox="1"/>
           <p:nvPr/>
         </p:nvSpPr>
@@ -6038,7 +6214,7 @@
       </p:sp>
       <p:sp>
         <p:nvSpPr>
-          <p:cNvPr id="37" name="TextBox 36"/>
+          <p:cNvPr id="41" name="TextBox 40"/>
           <p:cNvSpPr txBox="1"/>
           <p:nvPr/>
         </p:nvSpPr>
@@ -6073,7 +6249,7 @@
       </p:sp>
       <p:sp>
         <p:nvSpPr>
-          <p:cNvPr id="38" name="TextBox 37"/>
+          <p:cNvPr id="42" name="TextBox 41"/>
           <p:cNvSpPr txBox="1"/>
           <p:nvPr/>
         </p:nvSpPr>
@@ -6108,7 +6284,7 @@
       </p:sp>
       <p:sp>
         <p:nvSpPr>
-          <p:cNvPr id="39" name="TextBox 38"/>
+          <p:cNvPr id="43" name="TextBox 42"/>
           <p:cNvSpPr txBox="1"/>
           <p:nvPr/>
         </p:nvSpPr>
@@ -6143,7 +6319,7 @@
       </p:sp>
       <p:sp>
         <p:nvSpPr>
-          <p:cNvPr id="40" name="Rectangle 39"/>
+          <p:cNvPr id="44" name="Rectangle 43"/>
           <p:cNvSpPr/>
           <p:nvPr/>
         </p:nvSpPr>
@@ -6189,7 +6365,7 @@
       </p:sp>
       <p:sp>
         <p:nvSpPr>
-          <p:cNvPr id="41" name="Rectangle 40"/>
+          <p:cNvPr id="45" name="Rectangle 44"/>
           <p:cNvSpPr/>
           <p:nvPr/>
         </p:nvSpPr>
@@ -6233,7 +6409,7 @@
       </p:sp>
       <p:sp>
         <p:nvSpPr>
-          <p:cNvPr id="42" name="TextBox 41"/>
+          <p:cNvPr id="46" name="TextBox 45"/>
           <p:cNvSpPr txBox="1"/>
           <p:nvPr/>
         </p:nvSpPr>
@@ -6268,7 +6444,7 @@
       </p:sp>
       <p:sp>
         <p:nvSpPr>
-          <p:cNvPr id="43" name="TextBox 42"/>
+          <p:cNvPr id="47" name="TextBox 46"/>
           <p:cNvSpPr txBox="1"/>
           <p:nvPr/>
         </p:nvSpPr>
@@ -6303,7 +6479,7 @@
       </p:sp>
       <p:sp>
         <p:nvSpPr>
-          <p:cNvPr id="44" name="TextBox 43"/>
+          <p:cNvPr id="48" name="TextBox 47"/>
           <p:cNvSpPr txBox="1"/>
           <p:nvPr/>
         </p:nvSpPr>
@@ -6338,7 +6514,7 @@
       </p:sp>
       <p:sp>
         <p:nvSpPr>
-          <p:cNvPr id="45" name="TextBox 44"/>
+          <p:cNvPr id="49" name="TextBox 48"/>
           <p:cNvSpPr txBox="1"/>
           <p:nvPr/>
         </p:nvSpPr>
@@ -6373,7 +6549,7 @@
       </p:sp>
       <p:sp>
         <p:nvSpPr>
-          <p:cNvPr id="46" name="Rectangle 45"/>
+          <p:cNvPr id="50" name="Rectangle 49"/>
           <p:cNvSpPr/>
           <p:nvPr/>
         </p:nvSpPr>
@@ -6419,7 +6595,7 @@
       </p:sp>
       <p:sp>
         <p:nvSpPr>
-          <p:cNvPr id="47" name="Rectangle 46"/>
+          <p:cNvPr id="51" name="Rectangle 50"/>
           <p:cNvSpPr/>
           <p:nvPr/>
         </p:nvSpPr>
@@ -6463,7 +6639,7 @@
       </p:sp>
       <p:sp>
         <p:nvSpPr>
-          <p:cNvPr id="48" name="TextBox 47"/>
+          <p:cNvPr id="52" name="TextBox 51"/>
           <p:cNvSpPr txBox="1"/>
           <p:nvPr/>
         </p:nvSpPr>
@@ -6498,7 +6674,7 @@
       </p:sp>
       <p:sp>
         <p:nvSpPr>
-          <p:cNvPr id="49" name="TextBox 48"/>
+          <p:cNvPr id="53" name="TextBox 52"/>
           <p:cNvSpPr txBox="1"/>
           <p:nvPr/>
         </p:nvSpPr>
@@ -6533,7 +6709,7 @@
       </p:sp>
       <p:sp>
         <p:nvSpPr>
-          <p:cNvPr id="50" name="TextBox 49"/>
+          <p:cNvPr id="54" name="TextBox 53"/>
           <p:cNvSpPr txBox="1"/>
           <p:nvPr/>
         </p:nvSpPr>
@@ -6568,7 +6744,7 @@
       </p:sp>
       <p:sp>
         <p:nvSpPr>
-          <p:cNvPr id="51" name="TextBox 50"/>
+          <p:cNvPr id="55" name="TextBox 54"/>
           <p:cNvSpPr txBox="1"/>
           <p:nvPr/>
         </p:nvSpPr>
@@ -6603,7 +6779,7 @@
       </p:sp>
       <p:sp>
         <p:nvSpPr>
-          <p:cNvPr id="52" name="TextBox 51"/>
+          <p:cNvPr id="56" name="TextBox 55"/>
           <p:cNvSpPr txBox="1"/>
           <p:nvPr/>
         </p:nvSpPr>
@@ -6638,7 +6814,7 @@
       </p:sp>
       <p:sp>
         <p:nvSpPr>
-          <p:cNvPr id="53" name="Rectangle 52"/>
+          <p:cNvPr id="57" name="Rectangle 56"/>
           <p:cNvSpPr/>
           <p:nvPr/>
         </p:nvSpPr>
@@ -6684,7 +6860,7 @@
       </p:sp>
       <p:sp>
         <p:nvSpPr>
-          <p:cNvPr id="54" name="TextBox 53"/>
+          <p:cNvPr id="58" name="TextBox 57"/>
           <p:cNvSpPr txBox="1"/>
           <p:nvPr/>
         </p:nvSpPr>
@@ -6719,7 +6895,7 @@
       </p:sp>
       <p:sp>
         <p:nvSpPr>
-          <p:cNvPr id="55" name="Rectangle 54"/>
+          <p:cNvPr id="59" name="Rectangle 58"/>
           <p:cNvSpPr/>
           <p:nvPr/>
         </p:nvSpPr>
@@ -6765,7 +6941,7 @@
       </p:sp>
       <p:sp>
         <p:nvSpPr>
-          <p:cNvPr id="56" name="TextBox 55"/>
+          <p:cNvPr id="60" name="TextBox 59"/>
           <p:cNvSpPr txBox="1"/>
           <p:nvPr/>
         </p:nvSpPr>
@@ -6800,7 +6976,7 @@
       </p:sp>
       <p:sp>
         <p:nvSpPr>
-          <p:cNvPr id="57" name="Rectangle 56"/>
+          <p:cNvPr id="61" name="Rectangle 60"/>
           <p:cNvSpPr/>
           <p:nvPr/>
         </p:nvSpPr>
@@ -6846,7 +7022,7 @@
       </p:sp>
       <p:sp>
         <p:nvSpPr>
-          <p:cNvPr id="58" name="TextBox 57"/>
+          <p:cNvPr id="62" name="TextBox 61"/>
           <p:cNvSpPr txBox="1"/>
           <p:nvPr/>
         </p:nvSpPr>
@@ -6881,7 +7057,7 @@
       </p:sp>
       <p:sp>
         <p:nvSpPr>
-          <p:cNvPr id="59" name="Rectangle 58"/>
+          <p:cNvPr id="63" name="Rectangle 62"/>
           <p:cNvSpPr/>
           <p:nvPr/>
         </p:nvSpPr>
@@ -6927,7 +7103,7 @@
       </p:sp>
       <p:sp>
         <p:nvSpPr>
-          <p:cNvPr id="60" name="TextBox 59"/>
+          <p:cNvPr id="64" name="TextBox 63"/>
           <p:cNvSpPr txBox="1"/>
           <p:nvPr/>
         </p:nvSpPr>
@@ -6962,7 +7138,7 @@
       </p:sp>
       <p:sp>
         <p:nvSpPr>
-          <p:cNvPr id="61" name="Rectangle 60"/>
+          <p:cNvPr id="65" name="Rectangle 64"/>
           <p:cNvSpPr/>
           <p:nvPr/>
         </p:nvSpPr>
@@ -7008,7 +7184,7 @@
       </p:sp>
       <p:sp>
         <p:nvSpPr>
-          <p:cNvPr id="62" name="TextBox 61"/>
+          <p:cNvPr id="66" name="TextBox 65"/>
           <p:cNvSpPr txBox="1"/>
           <p:nvPr/>
         </p:nvSpPr>
@@ -7043,7 +7219,7 @@
       </p:sp>
       <p:sp>
         <p:nvSpPr>
-          <p:cNvPr id="63" name="Rectangle 62"/>
+          <p:cNvPr id="67" name="Rectangle 66"/>
           <p:cNvSpPr/>
           <p:nvPr/>
         </p:nvSpPr>
@@ -7089,7 +7265,7 @@
       </p:sp>
       <p:sp>
         <p:nvSpPr>
-          <p:cNvPr id="64" name="TextBox 63"/>
+          <p:cNvPr id="68" name="TextBox 67"/>
           <p:cNvSpPr txBox="1"/>
           <p:nvPr/>
         </p:nvSpPr>
@@ -7124,7 +7300,7 @@
       </p:sp>
       <p:sp>
         <p:nvSpPr>
-          <p:cNvPr id="65" name="Rectangle 64"/>
+          <p:cNvPr id="69" name="Rectangle 68"/>
           <p:cNvSpPr/>
           <p:nvPr/>
         </p:nvSpPr>
@@ -7170,7 +7346,7 @@
       </p:sp>
       <p:sp>
         <p:nvSpPr>
-          <p:cNvPr id="66" name="TextBox 65"/>
+          <p:cNvPr id="70" name="TextBox 69"/>
           <p:cNvSpPr txBox="1"/>
           <p:nvPr/>
         </p:nvSpPr>
@@ -7205,7 +7381,7 @@
       </p:sp>
       <p:sp>
         <p:nvSpPr>
-          <p:cNvPr id="67" name="Rectangle 66"/>
+          <p:cNvPr id="71" name="Rectangle 70"/>
           <p:cNvSpPr/>
           <p:nvPr/>
         </p:nvSpPr>
@@ -7251,7 +7427,7 @@
       </p:sp>
       <p:sp>
         <p:nvSpPr>
-          <p:cNvPr id="68" name="TextBox 67"/>
+          <p:cNvPr id="72" name="TextBox 71"/>
           <p:cNvSpPr txBox="1"/>
           <p:nvPr/>
         </p:nvSpPr>
@@ -7286,7 +7462,7 @@
       </p:sp>
       <p:sp>
         <p:nvSpPr>
-          <p:cNvPr id="69" name="Rectangle 68"/>
+          <p:cNvPr id="73" name="Rectangle 72"/>
           <p:cNvSpPr/>
           <p:nvPr/>
         </p:nvSpPr>
@@ -7332,7 +7508,7 @@
       </p:sp>
       <p:sp>
         <p:nvSpPr>
-          <p:cNvPr id="70" name="TextBox 69"/>
+          <p:cNvPr id="74" name="TextBox 73"/>
           <p:cNvSpPr txBox="1"/>
           <p:nvPr/>
         </p:nvSpPr>
@@ -7367,7 +7543,7 @@
       </p:sp>
       <p:sp>
         <p:nvSpPr>
-          <p:cNvPr id="71" name="Rectangle 70"/>
+          <p:cNvPr id="75" name="Rectangle 74"/>
           <p:cNvSpPr/>
           <p:nvPr/>
         </p:nvSpPr>
@@ -7413,7 +7589,7 @@
       </p:sp>
       <p:sp>
         <p:nvSpPr>
-          <p:cNvPr id="72" name="TextBox 71"/>
+          <p:cNvPr id="76" name="TextBox 75"/>
           <p:cNvSpPr txBox="1"/>
           <p:nvPr/>
         </p:nvSpPr>
@@ -7448,7 +7624,7 @@
       </p:sp>
       <p:sp>
         <p:nvSpPr>
-          <p:cNvPr id="73" name="Rectangle 72"/>
+          <p:cNvPr id="77" name="Rectangle 76"/>
           <p:cNvSpPr/>
           <p:nvPr/>
         </p:nvSpPr>
@@ -7494,7 +7670,7 @@
       </p:sp>
       <p:sp>
         <p:nvSpPr>
-          <p:cNvPr id="74" name="TextBox 73"/>
+          <p:cNvPr id="78" name="TextBox 77"/>
           <p:cNvSpPr txBox="1"/>
           <p:nvPr/>
         </p:nvSpPr>
@@ -7529,7 +7705,7 @@
       </p:sp>
       <p:sp>
         <p:nvSpPr>
-          <p:cNvPr id="75" name="Rectangle 74"/>
+          <p:cNvPr id="79" name="Rectangle 78"/>
           <p:cNvSpPr/>
           <p:nvPr/>
         </p:nvSpPr>
@@ -7575,7 +7751,7 @@
       </p:sp>
       <p:sp>
         <p:nvSpPr>
-          <p:cNvPr id="76" name="TextBox 75"/>
+          <p:cNvPr id="80" name="TextBox 79"/>
           <p:cNvSpPr txBox="1"/>
           <p:nvPr/>
         </p:nvSpPr>
@@ -7610,7 +7786,7 @@
       </p:sp>
       <p:sp>
         <p:nvSpPr>
-          <p:cNvPr id="77" name="Rectangle 76"/>
+          <p:cNvPr id="81" name="Rectangle 80"/>
           <p:cNvSpPr/>
           <p:nvPr/>
         </p:nvSpPr>
@@ -7656,7 +7832,7 @@
       </p:sp>
       <p:sp>
         <p:nvSpPr>
-          <p:cNvPr id="78" name="TextBox 77"/>
+          <p:cNvPr id="82" name="TextBox 81"/>
           <p:cNvSpPr txBox="1"/>
           <p:nvPr/>
         </p:nvSpPr>
@@ -7691,7 +7867,7 @@
       </p:sp>
       <p:sp>
         <p:nvSpPr>
-          <p:cNvPr id="79" name="Rectangle 78"/>
+          <p:cNvPr id="83" name="Rectangle 82"/>
           <p:cNvSpPr/>
           <p:nvPr/>
         </p:nvSpPr>
@@ -7737,7 +7913,7 @@
       </p:sp>
       <p:sp>
         <p:nvSpPr>
-          <p:cNvPr id="80" name="TextBox 79"/>
+          <p:cNvPr id="84" name="TextBox 83"/>
           <p:cNvSpPr txBox="1"/>
           <p:nvPr/>
         </p:nvSpPr>
@@ -7772,7 +7948,7 @@
       </p:sp>
       <p:sp>
         <p:nvSpPr>
-          <p:cNvPr id="81" name="Rectangle 80"/>
+          <p:cNvPr id="85" name="Rectangle 84"/>
           <p:cNvSpPr/>
           <p:nvPr/>
         </p:nvSpPr>
@@ -7818,7 +7994,7 @@
       </p:sp>
       <p:sp>
         <p:nvSpPr>
-          <p:cNvPr id="82" name="TextBox 81"/>
+          <p:cNvPr id="86" name="TextBox 85"/>
           <p:cNvSpPr txBox="1"/>
           <p:nvPr/>
         </p:nvSpPr>
@@ -7853,7 +8029,7 @@
       </p:sp>
       <p:sp>
         <p:nvSpPr>
-          <p:cNvPr id="83" name="Rectangle 82"/>
+          <p:cNvPr id="87" name="Rectangle 86"/>
           <p:cNvSpPr/>
           <p:nvPr/>
         </p:nvSpPr>
@@ -7899,7 +8075,7 @@
       </p:sp>
       <p:sp>
         <p:nvSpPr>
-          <p:cNvPr id="84" name="TextBox 83"/>
+          <p:cNvPr id="88" name="TextBox 87"/>
           <p:cNvSpPr txBox="1"/>
           <p:nvPr/>
         </p:nvSpPr>
@@ -7934,7 +8110,7 @@
       </p:sp>
       <p:sp>
         <p:nvSpPr>
-          <p:cNvPr id="85" name="Rectangle 84"/>
+          <p:cNvPr id="89" name="Rectangle 88"/>
           <p:cNvSpPr/>
           <p:nvPr/>
         </p:nvSpPr>
@@ -7980,7 +8156,7 @@
       </p:sp>
       <p:sp>
         <p:nvSpPr>
-          <p:cNvPr id="86" name="TextBox 85"/>
+          <p:cNvPr id="90" name="TextBox 89"/>
           <p:cNvSpPr txBox="1"/>
           <p:nvPr/>
         </p:nvSpPr>
@@ -8015,7 +8191,7 @@
       </p:sp>
       <p:sp>
         <p:nvSpPr>
-          <p:cNvPr id="87" name="Rectangle 86"/>
+          <p:cNvPr id="91" name="Rectangle 90"/>
           <p:cNvSpPr/>
           <p:nvPr/>
         </p:nvSpPr>
@@ -8061,7 +8237,7 @@
       </p:sp>
       <p:sp>
         <p:nvSpPr>
-          <p:cNvPr id="88" name="TextBox 87"/>
+          <p:cNvPr id="92" name="TextBox 91"/>
           <p:cNvSpPr txBox="1"/>
           <p:nvPr/>
         </p:nvSpPr>
@@ -8096,7 +8272,7 @@
       </p:sp>
       <p:sp>
         <p:nvSpPr>
-          <p:cNvPr id="89" name="TextBox 88"/>
+          <p:cNvPr id="93" name="TextBox 92"/>
           <p:cNvSpPr txBox="1"/>
           <p:nvPr/>
         </p:nvSpPr>
@@ -8131,7 +8307,7 @@
       </p:sp>
       <p:sp>
         <p:nvSpPr>
-          <p:cNvPr id="90" name="Rectangle 89"/>
+          <p:cNvPr id="94" name="Rectangle 93"/>
           <p:cNvSpPr/>
           <p:nvPr/>
         </p:nvSpPr>
@@ -8177,7 +8353,7 @@
       </p:sp>
       <p:sp>
         <p:nvSpPr>
-          <p:cNvPr id="91" name="Rectangle 90"/>
+          <p:cNvPr id="95" name="Rectangle 94"/>
           <p:cNvSpPr/>
           <p:nvPr/>
         </p:nvSpPr>
@@ -8221,14 +8397,62 @@
       </p:sp>
       <p:sp>
         <p:nvSpPr>
-          <p:cNvPr id="92" name="TextBox 91"/>
+          <p:cNvPr id="96" name="Rounded Rectangle 95"/>
+          <p:cNvSpPr/>
+          <p:nvPr/>
+        </p:nvSpPr>
+        <p:spPr>
+          <a:xfrm>
+            <a:off x="8595360" y="4462272"/>
+            <a:ext cx="237744" cy="237744"/>
+          </a:xfrm>
+          <a:prstGeom prst="roundRect">
+            <a:avLst>
+              <a:gd name="adj" fmla="val 50000"/>
+            </a:avLst>
+          </a:prstGeom>
+          <a:solidFill>
+            <a:srgbClr val="FFFFFF"/>
+          </a:solidFill>
+          <a:ln w="15875">
+            <a:solidFill>
+              <a:srgbClr val="F36949"/>
+            </a:solidFill>
+          </a:ln>
+          <a:effectLst/>
+        </p:spPr>
+        <p:style>
+          <a:lnRef idx="1">
+            <a:schemeClr val="accent1"/>
+          </a:lnRef>
+          <a:fillRef idx="3">
+            <a:schemeClr val="accent1"/>
+          </a:fillRef>
+          <a:effectRef idx="2">
+            <a:schemeClr val="accent1"/>
+          </a:effectRef>
+          <a:fontRef idx="minor">
+            <a:schemeClr val="lt1"/>
+          </a:fontRef>
+        </p:style>
+        <p:txBody>
+          <a:bodyPr rtlCol="0" anchor="ctr" wrap="square"/>
+          <a:lstStyle/>
+          <a:p>
+            <a:pPr algn="ctr"/>
+          </a:p>
+        </p:txBody>
+      </p:sp>
+      <p:sp>
+        <p:nvSpPr>
+          <p:cNvPr id="97" name="TextBox 96"/>
           <p:cNvSpPr txBox="1"/>
           <p:nvPr/>
         </p:nvSpPr>
         <p:spPr>
           <a:xfrm>
-            <a:off x="8577072" y="4315968"/>
-            <a:ext cx="3063240" cy="1755648"/>
+            <a:off x="8595360" y="4462272"/>
+            <a:ext cx="237744" cy="237744"/>
           </a:xfrm>
           <a:prstGeom prst="rect">
             <a:avLst/>
@@ -8243,27 +8467,27 @@
           <a:p>
             <a:pPr algn="ctr"/>
             <a:r>
-              <a:rPr sz="900" b="0">
-                <a:solidFill>
-                  <a:srgbClr val="8A9095"/>
+              <a:rPr sz="950" b="1">
+                <a:solidFill>
+                  <a:srgbClr val="F36949"/>
                 </a:solidFill>
                 <a:latin typeface="Replica LL TT"/>
               </a:rPr>
-              <a:t>To be confirmed with the pack owner.</a:t>
-            </a:r>
-          </a:p>
-        </p:txBody>
-      </p:sp>
-      <p:sp>
-        <p:nvSpPr>
-          <p:cNvPr id="93" name="TextBox 92"/>
+              <a:t>1</a:t>
+            </a:r>
+          </a:p>
+        </p:txBody>
+      </p:sp>
+      <p:sp>
+        <p:nvSpPr>
+          <p:cNvPr id="98" name="TextBox 97"/>
           <p:cNvSpPr txBox="1"/>
           <p:nvPr/>
         </p:nvSpPr>
         <p:spPr>
           <a:xfrm>
-            <a:off x="384048" y="6217920"/>
-            <a:ext cx="11430000" cy="274320"/>
+            <a:off x="8961120" y="4443984"/>
+            <a:ext cx="2660904" cy="384048"/>
           </a:xfrm>
           <a:prstGeom prst="rect">
             <a:avLst/>
@@ -8278,13 +8502,284 @@
           <a:p>
             <a:pPr algn="l"/>
             <a:r>
-              <a:rPr sz="800" b="0">
-                <a:solidFill>
-                  <a:srgbClr val="8A9095"/>
+              <a:rPr sz="1000" b="1">
+                <a:solidFill>
+                  <a:srgbClr val="26282B"/>
                 </a:solidFill>
                 <a:latin typeface="Replica LL TT"/>
               </a:rPr>
-              <a:t>Figures are illustrative and subject to confirmation. Pack scope differs from the delivered engagement: Not the first client's results or set-up: their sources, their list of companies and their own catalog of moves are configured for each client; what every client gets is the reasoning that finds which companies a piece of news touches and the move it opens for each.</a:t>
+              <a:t>Confirm the three business metrics and the tier prices, both open in the brief.</a:t>
+            </a:r>
+          </a:p>
+        </p:txBody>
+      </p:sp>
+      <p:sp>
+        <p:nvSpPr>
+          <p:cNvPr id="99" name="Rounded Rectangle 98"/>
+          <p:cNvSpPr/>
+          <p:nvPr/>
+        </p:nvSpPr>
+        <p:spPr>
+          <a:xfrm>
+            <a:off x="8595360" y="5047488"/>
+            <a:ext cx="237744" cy="237744"/>
+          </a:xfrm>
+          <a:prstGeom prst="roundRect">
+            <a:avLst>
+              <a:gd name="adj" fmla="val 50000"/>
+            </a:avLst>
+          </a:prstGeom>
+          <a:solidFill>
+            <a:srgbClr val="FFFFFF"/>
+          </a:solidFill>
+          <a:ln w="15875">
+            <a:solidFill>
+              <a:srgbClr val="F36949"/>
+            </a:solidFill>
+          </a:ln>
+          <a:effectLst/>
+        </p:spPr>
+        <p:style>
+          <a:lnRef idx="1">
+            <a:schemeClr val="accent1"/>
+          </a:lnRef>
+          <a:fillRef idx="3">
+            <a:schemeClr val="accent1"/>
+          </a:fillRef>
+          <a:effectRef idx="2">
+            <a:schemeClr val="accent1"/>
+          </a:effectRef>
+          <a:fontRef idx="minor">
+            <a:schemeClr val="lt1"/>
+          </a:fontRef>
+        </p:style>
+        <p:txBody>
+          <a:bodyPr rtlCol="0" anchor="ctr" wrap="square"/>
+          <a:lstStyle/>
+          <a:p>
+            <a:pPr algn="ctr"/>
+          </a:p>
+        </p:txBody>
+      </p:sp>
+      <p:sp>
+        <p:nvSpPr>
+          <p:cNvPr id="100" name="TextBox 99"/>
+          <p:cNvSpPr txBox="1"/>
+          <p:nvPr/>
+        </p:nvSpPr>
+        <p:spPr>
+          <a:xfrm>
+            <a:off x="8595360" y="5047488"/>
+            <a:ext cx="237744" cy="237744"/>
+          </a:xfrm>
+          <a:prstGeom prst="rect">
+            <a:avLst/>
+          </a:prstGeom>
+          <a:noFill/>
+        </p:spPr>
+        <p:txBody>
+          <a:bodyPr wrap="square" lIns="0" rIns="0" tIns="0" bIns="0" anchor="ctr">
+            <a:spAutoFit/>
+          </a:bodyPr>
+          <a:lstStyle/>
+          <a:p>
+            <a:pPr algn="ctr"/>
+            <a:r>
+              <a:rPr sz="950" b="1">
+                <a:solidFill>
+                  <a:srgbClr val="F36949"/>
+                </a:solidFill>
+                <a:latin typeface="Replica LL TT"/>
+              </a:rPr>
+              <a:t>2</a:t>
+            </a:r>
+          </a:p>
+        </p:txBody>
+      </p:sp>
+      <p:sp>
+        <p:nvSpPr>
+          <p:cNvPr id="101" name="TextBox 100"/>
+          <p:cNvSpPr txBox="1"/>
+          <p:nvPr/>
+        </p:nvSpPr>
+        <p:spPr>
+          <a:xfrm>
+            <a:off x="8961120" y="5029200"/>
+            <a:ext cx="2660904" cy="384048"/>
+          </a:xfrm>
+          <a:prstGeom prst="rect">
+            <a:avLst/>
+          </a:prstGeom>
+          <a:noFill/>
+        </p:spPr>
+        <p:txBody>
+          <a:bodyPr wrap="square" lIns="0" rIns="0" tIns="0" bIns="0" anchor="t">
+            <a:spAutoFit/>
+          </a:bodyPr>
+          <a:lstStyle/>
+          <a:p>
+            <a:pPr algn="l"/>
+            <a:r>
+              <a:rPr sz="1000" b="1">
+                <a:solidFill>
+                  <a:srgbClr val="26282B"/>
+                </a:solidFill>
+                <a:latin typeface="Replica LL TT"/>
+              </a:rPr>
+              <a:t>Run the DHL proof of value, 12 weeks, contracted; its results fill the proof block.</a:t>
+            </a:r>
+          </a:p>
+        </p:txBody>
+      </p:sp>
+      <p:sp>
+        <p:nvSpPr>
+          <p:cNvPr id="102" name="Rounded Rectangle 101"/>
+          <p:cNvSpPr/>
+          <p:nvPr/>
+        </p:nvSpPr>
+        <p:spPr>
+          <a:xfrm>
+            <a:off x="8595360" y="5632704"/>
+            <a:ext cx="237744" cy="237744"/>
+          </a:xfrm>
+          <a:prstGeom prst="roundRect">
+            <a:avLst>
+              <a:gd name="adj" fmla="val 50000"/>
+            </a:avLst>
+          </a:prstGeom>
+          <a:solidFill>
+            <a:srgbClr val="FFFFFF"/>
+          </a:solidFill>
+          <a:ln w="15875">
+            <a:solidFill>
+              <a:srgbClr val="F36949"/>
+            </a:solidFill>
+          </a:ln>
+          <a:effectLst/>
+        </p:spPr>
+        <p:style>
+          <a:lnRef idx="1">
+            <a:schemeClr val="accent1"/>
+          </a:lnRef>
+          <a:fillRef idx="3">
+            <a:schemeClr val="accent1"/>
+          </a:fillRef>
+          <a:effectRef idx="2">
+            <a:schemeClr val="accent1"/>
+          </a:effectRef>
+          <a:fontRef idx="minor">
+            <a:schemeClr val="lt1"/>
+          </a:fontRef>
+        </p:style>
+        <p:txBody>
+          <a:bodyPr rtlCol="0" anchor="ctr" wrap="square"/>
+          <a:lstStyle/>
+          <a:p>
+            <a:pPr algn="ctr"/>
+          </a:p>
+        </p:txBody>
+      </p:sp>
+      <p:sp>
+        <p:nvSpPr>
+          <p:cNvPr id="103" name="TextBox 102"/>
+          <p:cNvSpPr txBox="1"/>
+          <p:nvPr/>
+        </p:nvSpPr>
+        <p:spPr>
+          <a:xfrm>
+            <a:off x="8595360" y="5632704"/>
+            <a:ext cx="237744" cy="237744"/>
+          </a:xfrm>
+          <a:prstGeom prst="rect">
+            <a:avLst/>
+          </a:prstGeom>
+          <a:noFill/>
+        </p:spPr>
+        <p:txBody>
+          <a:bodyPr wrap="square" lIns="0" rIns="0" tIns="0" bIns="0" anchor="ctr">
+            <a:spAutoFit/>
+          </a:bodyPr>
+          <a:lstStyle/>
+          <a:p>
+            <a:pPr algn="ctr"/>
+            <a:r>
+              <a:rPr sz="950" b="1">
+                <a:solidFill>
+                  <a:srgbClr val="F36949"/>
+                </a:solidFill>
+                <a:latin typeface="Replica LL TT"/>
+              </a:rPr>
+              <a:t>3</a:t>
+            </a:r>
+          </a:p>
+        </p:txBody>
+      </p:sp>
+      <p:sp>
+        <p:nvSpPr>
+          <p:cNvPr id="104" name="TextBox 103"/>
+          <p:cNvSpPr txBox="1"/>
+          <p:nvPr/>
+        </p:nvSpPr>
+        <p:spPr>
+          <a:xfrm>
+            <a:off x="8961120" y="5614416"/>
+            <a:ext cx="2660904" cy="384048"/>
+          </a:xfrm>
+          <a:prstGeom prst="rect">
+            <a:avLst/>
+          </a:prstGeom>
+          <a:noFill/>
+        </p:spPr>
+        <p:txBody>
+          <a:bodyPr wrap="square" lIns="0" rIns="0" tIns="0" bIns="0" anchor="t">
+            <a:spAutoFit/>
+          </a:bodyPr>
+          <a:lstStyle/>
+          <a:p>
+            <a:pPr algn="l"/>
+            <a:r>
+              <a:rPr sz="800" b="1">
+                <a:solidFill>
+                  <a:srgbClr val="26282B"/>
+                </a:solidFill>
+                <a:latin typeface="Replica LL TT"/>
+              </a:rPr>
+              <a:t>Publish the pack on the Oracle AI &amp; Data Solutions site (listing and interactive demo) and brief the Oracle alliance team.</a:t>
+            </a:r>
+          </a:p>
+        </p:txBody>
+      </p:sp>
+      <p:sp>
+        <p:nvSpPr>
+          <p:cNvPr id="105" name="TextBox 104"/>
+          <p:cNvSpPr txBox="1"/>
+          <p:nvPr/>
+        </p:nvSpPr>
+        <p:spPr>
+          <a:xfrm>
+            <a:off x="384048" y="6217920"/>
+            <a:ext cx="11430000" cy="274320"/>
+          </a:xfrm>
+          <a:prstGeom prst="rect">
+            <a:avLst/>
+          </a:prstGeom>
+          <a:noFill/>
+        </p:spPr>
+        <p:txBody>
+          <a:bodyPr wrap="square" lIns="0" rIns="0" tIns="0" bIns="0" anchor="t">
+            <a:spAutoFit/>
+          </a:bodyPr>
+          <a:lstStyle/>
+          <a:p>
+            <a:pPr algn="l"/>
+            <a:r>
+              <a:rPr sz="800" b="0">
+                <a:solidFill>
+                  <a:srgbClr val="8A9095"/>
+                </a:solidFill>
+                <a:latin typeface="Replica LL TT"/>
+              </a:rPr>
+              <a:t>Not the first client's results or set-up: their sources, their list of companies and their own catalog of moves are configured for each client; what every client gets is the reasoning that finds which companies a piece of news touches and the move it opens for each.</a:t>
             </a:r>
           </a:p>
         </p:txBody>

--- a/outputs/oracle-packs/account-insights/artifacts/account-insights-exec-summary.pptx
+++ b/outputs/oracle-packs/account-insights/artifacts/account-insights-exec-summary.pptx
@@ -8626,7 +8626,7 @@
                 </a:solidFill>
                 <a:latin typeface="Replica LL TT"/>
               </a:rPr>
-              <a:t>Run the DHL proof of value, 12 weeks, contracted; its results fill the proof block.</a:t>
+              <a:t>Run the contracted DHL proof of value; its results fill the proof block.</a:t>
             </a:r>
           </a:p>
         </p:txBody>

--- a/outputs/oracle-packs/account-insights/artifacts/account-insights-exec-summary.pptx
+++ b/outputs/oracle-packs/account-insights/artifacts/account-insights-exec-summary.pptx
@@ -8508,7 +8508,7 @@
                 </a:solidFill>
                 <a:latin typeface="Replica LL TT"/>
               </a:rPr>
-              <a:t>Confirm the three business metrics and the tier prices, both open in the brief.</a:t>
+              <a:t>Confirm the three metrics and set the tier prices; both are still open.</a:t>
             </a:r>
           </a:p>
         </p:txBody>
@@ -8626,7 +8626,7 @@
                 </a:solidFill>
                 <a:latin typeface="Replica LL TT"/>
               </a:rPr>
-              <a:t>Run the contracted DHL proof of value; its results fill the proof block.</a:t>
+              <a:t>Run the contracted DHL engagement and measure the three metrics.</a:t>
             </a:r>
           </a:p>
         </p:txBody>
@@ -8744,7 +8744,7 @@
                 </a:solidFill>
                 <a:latin typeface="Replica LL TT"/>
               </a:rPr>
-              <a:t>Publish the pack on the Oracle AI &amp; Data Solutions site (listing and interactive demo) and brief the Oracle alliance team.</a:t>
+              <a:t>Publish the app and its demo on the Oracle AI &amp; Data Solutions site; brief SoftServe's Oracle alliance team.</a:t>
             </a:r>
           </a:p>
         </p:txBody>
@@ -8779,7 +8779,7 @@
                 </a:solidFill>
                 <a:latin typeface="Replica LL TT"/>
               </a:rPr>
-              <a:t>Not the first client's results or set-up: their sources, their list of companies and their own catalog of moves are configured for each client; what every client gets is the reasoning that finds which companies a piece of news touches and the move it opens for each.</a:t>
+              <a:t>Not one engagement's set-up: each client's sources, list of companies and catalog of moves are configured for it; what every client gets is the reasoning that finds which companies a piece of news touches and the move it opens for each.</a:t>
             </a:r>
           </a:p>
         </p:txBody>
